--- a/reports/acdr2026_staff_deployment/ACDR2026_Classroom_block_1Oct_corrected.pptx
+++ b/reports/acdr2026_staff_deployment/ACDR2026_Classroom_block_1Oct_corrected.pptx
@@ -3105,14 +3105,14 @@
           <a:noFill/>
         </p:spPr>
         <p:txBody>
-          <a:bodyPr wrap="none">
+          <a:bodyPr wrap="square">
             <a:spAutoFit/>
           </a:bodyPr>
           <a:lstStyle/>
           <a:p>
             <a:r>
-              <a:rPr sz="1400" b="1"/>
-              <a:t>Classroom block (3 rows x 5 tables x 2 seats = 30) - corrected to the ADRC seating plan of 1 Oct   (* = table microphone for Round Table speakers)</a:t>
+              <a:rPr sz="1300" b="1"/>
+              <a:t>Classroom block (3 rows x 5 tables x 2 seats = 30), corrected to the ADRC seating plan of 1 Oct</a:t>
             </a:r>
           </a:p>
         </p:txBody>
@@ -5292,7 +5292,7 @@
           <a:p>
             <a:r>
               <a:rPr sz="1100"/>
-              <a:t>Front row is nearest to the U-shape. Left side = Japanese delegation (Cabinet Office of Japan 4, City of Sendai 5, JICA, Tohoku Univ., JAXA 2). Name cards on all seats of rows 1 and 2 (20 seats) and on the ADRC Secretariat table; the other 8 seats of row 3 are free seating.</a:t>
+              <a:t>* = table microphone for Round Table speakers. Front row is nearest to the U-shape. Left side = Japanese delegation (Cabinet Office of Japan 4, City of Sendai 5, JICA, Tohoku Univ., JAXA 2). Name cards on all seats of rows 1 and 2 (20 seats) and on the ADRC Secretariat table; the other 8 seats of row 3 are free seating.</a:t>
             </a:r>
           </a:p>
         </p:txBody>
